--- a/sample/graph8.pptx
+++ b/sample/graph8.pptx
@@ -678,7 +678,7 @@
               </a:lnSpc>
             </a:pPr>
             <a:r>
-              <a:rPr lang="ja-JP" altLang="en-US" sz="1100" b="1">
+              <a:rPr lang="ja-JP" altLang="en-US" sz="1050" b="1">
                 <a:solidFill>
                   <a:srgbClr val="333333"/>
                 </a:solidFill>
@@ -719,7 +719,7 @@
               </a:lnSpc>
             </a:pPr>
             <a:r>
-              <a:rPr lang="ja-JP" altLang="en-US" sz="1100">
+              <a:rPr lang="ja-JP" altLang="en-US" sz="1050">
                 <a:solidFill>
                   <a:srgbClr val="333333"/>
                 </a:solidFill>
@@ -760,7 +760,7 @@
               </a:lnSpc>
             </a:pPr>
             <a:r>
-              <a:rPr lang="ja-JP" altLang="en-US" sz="1100">
+              <a:rPr lang="ja-JP" altLang="en-US" sz="1050">
                 <a:solidFill>
                   <a:srgbClr val="333333"/>
                 </a:solidFill>
@@ -801,7 +801,7 @@
               </a:lnSpc>
             </a:pPr>
             <a:r>
-              <a:rPr lang="ja-JP" altLang="en-US" sz="1100">
+              <a:rPr lang="ja-JP" altLang="en-US" sz="1050">
                 <a:solidFill>
                   <a:srgbClr val="333333"/>
                 </a:solidFill>
@@ -842,7 +842,7 @@
               </a:lnSpc>
             </a:pPr>
             <a:r>
-              <a:rPr lang="ja-JP" altLang="en-US" sz="1100">
+              <a:rPr lang="ja-JP" altLang="en-US" sz="1050">
                 <a:solidFill>
                   <a:srgbClr val="333333"/>
                 </a:solidFill>
@@ -883,7 +883,7 @@
               </a:lnSpc>
             </a:pPr>
             <a:r>
-              <a:rPr lang="ja-JP" altLang="en-US" sz="1100">
+              <a:rPr lang="ja-JP" altLang="en-US" sz="1050">
                 <a:solidFill>
                   <a:srgbClr val="333333"/>
                 </a:solidFill>
@@ -924,7 +924,7 @@
               </a:lnSpc>
             </a:pPr>
             <a:r>
-              <a:rPr lang="ja-JP" altLang="en-US" sz="1100">
+              <a:rPr lang="ja-JP" altLang="en-US" sz="1050">
                 <a:solidFill>
                   <a:srgbClr val="333333"/>
                 </a:solidFill>
@@ -965,7 +965,7 @@
               </a:lnSpc>
             </a:pPr>
             <a:r>
-              <a:rPr lang="ja-JP" altLang="en-US" sz="1100">
+              <a:rPr lang="ja-JP" altLang="en-US" sz="1050">
                 <a:solidFill>
                   <a:srgbClr val="333333"/>
                 </a:solidFill>
@@ -1006,7 +1006,7 @@
               </a:lnSpc>
             </a:pPr>
             <a:r>
-              <a:rPr lang="ja-JP" altLang="en-US" sz="1100" b="1">
+              <a:rPr lang="ja-JP" altLang="en-US" sz="1050" b="1">
                 <a:solidFill>
                   <a:srgbClr val="333333"/>
                 </a:solidFill>
@@ -1047,7 +1047,7 @@
               </a:lnSpc>
             </a:pPr>
             <a:r>
-              <a:rPr lang="ja-JP" altLang="en-US" sz="1100">
+              <a:rPr lang="ja-JP" altLang="en-US" sz="1050">
                 <a:solidFill>
                   <a:srgbClr val="333333"/>
                 </a:solidFill>
@@ -1088,7 +1088,7 @@
               </a:lnSpc>
             </a:pPr>
             <a:r>
-              <a:rPr lang="ja-JP" altLang="en-US" sz="1100">
+              <a:rPr lang="ja-JP" altLang="en-US" sz="1050">
                 <a:solidFill>
                   <a:srgbClr val="333333"/>
                 </a:solidFill>
@@ -1129,7 +1129,7 @@
               </a:lnSpc>
             </a:pPr>
             <a:r>
-              <a:rPr lang="ja-JP" altLang="en-US" sz="1100">
+              <a:rPr lang="ja-JP" altLang="en-US" sz="1050">
                 <a:solidFill>
                   <a:srgbClr val="333333"/>
                 </a:solidFill>
@@ -1170,7 +1170,7 @@
               </a:lnSpc>
             </a:pPr>
             <a:r>
-              <a:rPr lang="ja-JP" altLang="en-US" sz="1100">
+              <a:rPr lang="ja-JP" altLang="en-US" sz="1050">
                 <a:solidFill>
                   <a:srgbClr val="333333"/>
                 </a:solidFill>
@@ -1211,7 +1211,7 @@
               </a:lnSpc>
             </a:pPr>
             <a:r>
-              <a:rPr lang="ja-JP" altLang="en-US" sz="1100">
+              <a:rPr lang="ja-JP" altLang="en-US" sz="1050">
                 <a:solidFill>
                   <a:srgbClr val="333333"/>
                 </a:solidFill>
@@ -1252,7 +1252,7 @@
               </a:lnSpc>
             </a:pPr>
             <a:r>
-              <a:rPr lang="ja-JP" altLang="en-US" sz="1100">
+              <a:rPr lang="ja-JP" altLang="en-US" sz="1050">
                 <a:solidFill>
                   <a:srgbClr val="333333"/>
                 </a:solidFill>
@@ -1293,7 +1293,7 @@
               </a:lnSpc>
             </a:pPr>
             <a:r>
-              <a:rPr lang="ja-JP" altLang="en-US" sz="1100">
+              <a:rPr lang="ja-JP" altLang="en-US" sz="1050">
                 <a:solidFill>
                   <a:srgbClr val="333333"/>
                 </a:solidFill>
@@ -1334,7 +1334,7 @@
               </a:lnSpc>
             </a:pPr>
             <a:r>
-              <a:rPr lang="ja-JP" altLang="en-US" sz="1100">
+              <a:rPr lang="ja-JP" altLang="en-US" sz="1050">
                 <a:solidFill>
                   <a:srgbClr val="333333"/>
                 </a:solidFill>
@@ -1375,7 +1375,7 @@
               </a:lnSpc>
             </a:pPr>
             <a:r>
-              <a:rPr lang="ja-JP" altLang="en-US" sz="1100" b="1">
+              <a:rPr lang="ja-JP" altLang="en-US" sz="1050" b="1">
                 <a:solidFill>
                   <a:srgbClr val="333333"/>
                 </a:solidFill>
@@ -1416,7 +1416,7 @@
               </a:lnSpc>
             </a:pPr>
             <a:r>
-              <a:rPr lang="ja-JP" altLang="en-US" sz="1100">
+              <a:rPr lang="ja-JP" altLang="en-US" sz="1050">
                 <a:solidFill>
                   <a:srgbClr val="333333"/>
                 </a:solidFill>
@@ -1457,7 +1457,7 @@
               </a:lnSpc>
             </a:pPr>
             <a:r>
-              <a:rPr lang="ja-JP" altLang="en-US" sz="1100">
+              <a:rPr lang="ja-JP" altLang="en-US" sz="1050">
                 <a:solidFill>
                   <a:srgbClr val="333333"/>
                 </a:solidFill>
@@ -1498,7 +1498,7 @@
               </a:lnSpc>
             </a:pPr>
             <a:r>
-              <a:rPr lang="ja-JP" altLang="en-US" sz="1100">
+              <a:rPr lang="ja-JP" altLang="en-US" sz="1050">
                 <a:solidFill>
                   <a:srgbClr val="333333"/>
                 </a:solidFill>
@@ -1539,7 +1539,7 @@
               </a:lnSpc>
             </a:pPr>
             <a:r>
-              <a:rPr lang="ja-JP" altLang="en-US" sz="1100">
+              <a:rPr lang="ja-JP" altLang="en-US" sz="1050">
                 <a:solidFill>
                   <a:srgbClr val="333333"/>
                 </a:solidFill>
@@ -1580,7 +1580,7 @@
               </a:lnSpc>
             </a:pPr>
             <a:r>
-              <a:rPr lang="ja-JP" altLang="en-US" sz="1100">
+              <a:rPr lang="ja-JP" altLang="en-US" sz="1050">
                 <a:solidFill>
                   <a:srgbClr val="333333"/>
                 </a:solidFill>
@@ -1621,7 +1621,7 @@
               </a:lnSpc>
             </a:pPr>
             <a:r>
-              <a:rPr lang="ja-JP" altLang="en-US" sz="1100">
+              <a:rPr lang="ja-JP" altLang="en-US" sz="1050">
                 <a:solidFill>
                   <a:srgbClr val="333333"/>
                 </a:solidFill>
@@ -1662,7 +1662,7 @@
               </a:lnSpc>
             </a:pPr>
             <a:r>
-              <a:rPr lang="ja-JP" altLang="en-US" sz="1100">
+              <a:rPr lang="ja-JP" altLang="en-US" sz="1050">
                 <a:solidFill>
                   <a:srgbClr val="333333"/>
                 </a:solidFill>
@@ -1703,7 +1703,7 @@
               </a:lnSpc>
             </a:pPr>
             <a:r>
-              <a:rPr lang="ja-JP" altLang="en-US" sz="1100">
+              <a:rPr lang="ja-JP" altLang="en-US" sz="1050">
                 <a:solidFill>
                   <a:srgbClr val="333333"/>
                 </a:solidFill>
@@ -1744,7 +1744,7 @@
               </a:lnSpc>
             </a:pPr>
             <a:r>
-              <a:rPr lang="ja-JP" altLang="en-US" sz="1100" b="1">
+              <a:rPr lang="ja-JP" altLang="en-US" sz="1050" b="1">
                 <a:solidFill>
                   <a:srgbClr val="333333"/>
                 </a:solidFill>
@@ -1785,7 +1785,7 @@
               </a:lnSpc>
             </a:pPr>
             <a:r>
-              <a:rPr lang="ja-JP" altLang="en-US" sz="1100">
+              <a:rPr lang="ja-JP" altLang="en-US" sz="1050">
                 <a:solidFill>
                   <a:srgbClr val="333333"/>
                 </a:solidFill>
@@ -1826,7 +1826,7 @@
               </a:lnSpc>
             </a:pPr>
             <a:r>
-              <a:rPr lang="ja-JP" altLang="en-US" sz="1100">
+              <a:rPr lang="ja-JP" altLang="en-US" sz="1050">
                 <a:solidFill>
                   <a:srgbClr val="333333"/>
                 </a:solidFill>
@@ -1867,7 +1867,7 @@
               </a:lnSpc>
             </a:pPr>
             <a:r>
-              <a:rPr lang="ja-JP" altLang="en-US" sz="1100">
+              <a:rPr lang="ja-JP" altLang="en-US" sz="1050">
                 <a:solidFill>
                   <a:srgbClr val="333333"/>
                 </a:solidFill>
@@ -1908,7 +1908,7 @@
               </a:lnSpc>
             </a:pPr>
             <a:r>
-              <a:rPr lang="ja-JP" altLang="en-US" sz="1100">
+              <a:rPr lang="ja-JP" altLang="en-US" sz="1050">
                 <a:solidFill>
                   <a:srgbClr val="333333"/>
                 </a:solidFill>
@@ -1949,7 +1949,7 @@
               </a:lnSpc>
             </a:pPr>
             <a:r>
-              <a:rPr lang="ja-JP" altLang="en-US" sz="1100">
+              <a:rPr lang="ja-JP" altLang="en-US" sz="1050">
                 <a:solidFill>
                   <a:srgbClr val="333333"/>
                 </a:solidFill>
@@ -1990,7 +1990,7 @@
               </a:lnSpc>
             </a:pPr>
             <a:r>
-              <a:rPr lang="ja-JP" altLang="en-US" sz="1100">
+              <a:rPr lang="ja-JP" altLang="en-US" sz="1050">
                 <a:solidFill>
                   <a:srgbClr val="333333"/>
                 </a:solidFill>
@@ -2031,7 +2031,7 @@
               </a:lnSpc>
             </a:pPr>
             <a:r>
-              <a:rPr lang="ja-JP" altLang="en-US" sz="1100">
+              <a:rPr lang="ja-JP" altLang="en-US" sz="1050">
                 <a:solidFill>
                   <a:srgbClr val="333333"/>
                 </a:solidFill>
@@ -2051,8 +2051,8 @@
         </p:nvSpPr>
         <p:spPr>
           <a:xfrm>
-            <a:off x="4541519" y="2147276"/>
-            <a:ext cx="410249" cy="215778"/>
+            <a:off x="4510514" y="2147276"/>
+            <a:ext cx="472259" cy="215778"/>
           </a:xfrm>
           <a:prstGeom prst="roundRect">
             <a:avLst/>
@@ -2067,7 +2067,7 @@
           </a:ln>
         </p:spPr>
         <p:txBody>
-          <a:bodyPr rtlCol="0" anchor="ctr" lIns="18288" tIns="9144" rIns="18288" bIns="9144"/>
+          <a:bodyPr rtlCol="0" anchor="ctr" wrap="none" lIns="0" tIns="0" rIns="0" bIns="0"/>
           <a:lstStyle/>
           <a:p>
             <a:pPr algn="ctr">
@@ -2076,7 +2076,7 @@
               </a:lnSpc>
             </a:pPr>
             <a:r>
-              <a:rPr lang="ja-JP" altLang="en-US" sz="1100">
+              <a:rPr lang="ja-JP" altLang="en-US" sz="1050">
                 <a:solidFill>
                   <a:srgbClr val="333333"/>
                 </a:solidFill>
@@ -2096,8 +2096,8 @@
         </p:nvSpPr>
         <p:spPr>
           <a:xfrm>
-            <a:off x="4486361" y="4494945"/>
-            <a:ext cx="520565" cy="215778"/>
+            <a:off x="4448736" y="4494945"/>
+            <a:ext cx="595814" cy="215778"/>
           </a:xfrm>
           <a:prstGeom prst="roundRect">
             <a:avLst/>
@@ -2112,7 +2112,7 @@
           </a:ln>
         </p:spPr>
         <p:txBody>
-          <a:bodyPr rtlCol="0" anchor="ctr" lIns="18288" tIns="9144" rIns="18288" bIns="9144"/>
+          <a:bodyPr rtlCol="0" anchor="ctr" wrap="none" lIns="0" tIns="0" rIns="0" bIns="0"/>
           <a:lstStyle/>
           <a:p>
             <a:pPr algn="ctr">
@@ -2121,7 +2121,7 @@
               </a:lnSpc>
             </a:pPr>
             <a:r>
-              <a:rPr lang="ja-JP" altLang="en-US" sz="1100">
+              <a:rPr lang="ja-JP" altLang="en-US" sz="1050">
                 <a:solidFill>
                   <a:srgbClr val="333333"/>
                 </a:solidFill>
@@ -2141,8 +2141,8 @@
         </p:nvSpPr>
         <p:spPr>
           <a:xfrm>
-            <a:off x="7306786" y="4494945"/>
-            <a:ext cx="631287" cy="215778"/>
+            <a:off x="7262519" y="4494945"/>
+            <a:ext cx="719822" cy="215778"/>
           </a:xfrm>
           <a:prstGeom prst="roundRect">
             <a:avLst/>
@@ -2157,7 +2157,7 @@
           </a:ln>
         </p:spPr>
         <p:txBody>
-          <a:bodyPr rtlCol="0" anchor="ctr" lIns="18288" tIns="9144" rIns="18288" bIns="9144"/>
+          <a:bodyPr rtlCol="0" anchor="ctr" wrap="none" lIns="0" tIns="0" rIns="0" bIns="0"/>
           <a:lstStyle/>
           <a:p>
             <a:pPr algn="ctr">
@@ -2166,7 +2166,7 @@
               </a:lnSpc>
             </a:pPr>
             <a:r>
-              <a:rPr lang="ja-JP" altLang="en-US" sz="1100">
+              <a:rPr lang="ja-JP" altLang="en-US" sz="1050">
                 <a:solidFill>
                   <a:srgbClr val="333333"/>
                 </a:solidFill>

--- a/sample/graph8.pptx
+++ b/sample/graph8.pptx
@@ -2051,8 +2051,8 @@
         </p:nvSpPr>
         <p:spPr>
           <a:xfrm>
-            <a:off x="4510514" y="2147276"/>
-            <a:ext cx="472259" cy="215778"/>
+            <a:off x="4509374" y="2135604"/>
+            <a:ext cx="474538" cy="239124"/>
           </a:xfrm>
           <a:prstGeom prst="roundRect">
             <a:avLst/>
@@ -2096,8 +2096,8 @@
         </p:nvSpPr>
         <p:spPr>
           <a:xfrm>
-            <a:off x="4448736" y="4494945"/>
-            <a:ext cx="595814" cy="215778"/>
+            <a:off x="4447597" y="4483272"/>
+            <a:ext cx="598093" cy="239124"/>
           </a:xfrm>
           <a:prstGeom prst="roundRect">
             <a:avLst/>
@@ -2141,8 +2141,8 @@
         </p:nvSpPr>
         <p:spPr>
           <a:xfrm>
-            <a:off x="7262519" y="4494945"/>
-            <a:ext cx="719822" cy="215778"/>
+            <a:off x="7261379" y="4483272"/>
+            <a:ext cx="722101" cy="239124"/>
           </a:xfrm>
           <a:prstGeom prst="roundRect">
             <a:avLst/>
